--- a/Presentation/IterativeVerefoo_Presentation.pptx
+++ b/Presentation/IterativeVerefoo_Presentation.pptx
@@ -5,14 +5,14 @@
     <p:sldMasterId id="2147483648" r:id="rId1"/>
   </p:sldMasterIdLst>
   <p:notesMasterIdLst>
-    <p:notesMasterId r:id="rId14"/>
+    <p:notesMasterId r:id="rId15"/>
   </p:notesMasterIdLst>
   <p:sldIdLst>
     <p:sldId id="256" r:id="rId2"/>
     <p:sldId id="257" r:id="rId3"/>
     <p:sldId id="258" r:id="rId4"/>
     <p:sldId id="268" r:id="rId5"/>
-    <p:sldId id="260" r:id="rId6"/>
+    <p:sldId id="272" r:id="rId6"/>
     <p:sldId id="261" r:id="rId7"/>
     <p:sldId id="262" r:id="rId8"/>
     <p:sldId id="270" r:id="rId9"/>
@@ -20,6 +20,7 @@
     <p:sldId id="269" r:id="rId11"/>
     <p:sldId id="271" r:id="rId12"/>
     <p:sldId id="267" r:id="rId13"/>
+    <p:sldId id="273" r:id="rId14"/>
   </p:sldIdLst>
   <p:sldSz cx="12192000" cy="6858000"/>
   <p:notesSz cx="6858000" cy="12192000"/>
@@ -294,7 +295,7 @@
           <a:p>
             <a:r>
               <a:rPr lang="en-US" dirty="0"/>
-              <a:t>[0:00-0:30] Good morning everyone, thank you for being here. My name is Filippo Del Ministro and today I'll present my thesis, "An Incremental Approach to Automatic Firewall Configuration," supervised by professors Fulvio Valenza, Daniele Bringhenti, Francesco Pizzato, and Riccardo Sisto.</a:t>
+              <a:t>Good morning everyone, thank you for being here. My name is Filippo Del Ministro and today I'll present my thesis, "An Incremental Approach to Automatic Firewall Configuration," supervised by professors Fulvio Valenza, Daniele Bringhenti, Francesco Pizzato, and Riccardo Sisto.</a:t>
             </a:r>
           </a:p>
         </p:txBody>
@@ -576,6 +577,86 @@
               <a:t>[10:30-11:45] The iterative approach was validated qualitatively and reaches a result that almost matches the monolithic baseline in firewall count, with just one extra rule, despite never having visibility beyond the single requirement being processed. I expect scalability to be the main advantage as topologies and reconfigurations grow larger. Future work: quantitative time benchmark at larger scale, traffic-based requirement ordering to reduce tie-driven reconfigurations, support for NSR removal.</a:t>
             </a:r>
           </a:p>
+          <a:p>
+            <a:endParaRPr lang="en-US" dirty="0"/>
+          </a:p>
+          <a:p>
+            <a:r>
+              <a:rPr lang="en-US" dirty="0"/>
+              <a:t>---</a:t>
+            </a:r>
+          </a:p>
+          <a:p>
+            <a:endParaRPr lang="en-US" dirty="0"/>
+          </a:p>
+          <a:p>
+            <a:pPr marL="171450" indent="-171450">
+              <a:buFontTx/>
+              <a:buChar char="-"/>
+            </a:pPr>
+            <a:r>
+              <a:rPr lang="en-US" dirty="0"/>
+              <a:t>Finally, the iterative approach has been validated via a qualitative testing with a comparable result to the monolithic version</a:t>
+            </a:r>
+          </a:p>
+          <a:p>
+            <a:pPr marL="171450" indent="-171450">
+              <a:buFontTx/>
+              <a:buChar char="-"/>
+            </a:pPr>
+            <a:r>
+              <a:rPr lang="en-US" dirty="0"/>
+              <a:t>This approach could be particularly suited for high dynamic environment where topologies or requirements changes frequently</a:t>
+            </a:r>
+          </a:p>
+          <a:p>
+            <a:pPr marL="171450" indent="-171450">
+              <a:buFontTx/>
+              <a:buChar char="-"/>
+            </a:pPr>
+            <a:r>
+              <a:rPr lang="en-US" dirty="0"/>
+              <a:t>As future work I would like to propose</a:t>
+            </a:r>
+          </a:p>
+          <a:p>
+            <a:pPr marL="628650" lvl="1" indent="-171450">
+              <a:buFontTx/>
+              <a:buChar char="-"/>
+            </a:pPr>
+            <a:r>
+              <a:rPr lang="en-US" dirty="0"/>
+              <a:t>Quantitative test to benchmark the iterative solution, over multiple configuration and topologies</a:t>
+            </a:r>
+          </a:p>
+          <a:p>
+            <a:pPr marL="628650" lvl="1" indent="-171450">
+              <a:buFontTx/>
+              <a:buChar char="-"/>
+            </a:pPr>
+            <a:r>
+              <a:rPr lang="en-US" dirty="0"/>
+              <a:t>NSR removal which was not particularly considered in this thesis research</a:t>
+            </a:r>
+          </a:p>
+          <a:p>
+            <a:pPr marL="628650" lvl="1" indent="-171450">
+              <a:buFontTx/>
+              <a:buChar char="-"/>
+            </a:pPr>
+            <a:r>
+              <a:rPr lang="en-US" dirty="0"/>
+              <a:t>And finally one optimization proposal to order NSR keeping in mind their traffic </a:t>
+            </a:r>
+            <a:r>
+              <a:rPr lang="en-US" dirty="0" err="1"/>
+              <a:t>awereness</a:t>
+            </a:r>
+            <a:endParaRPr lang="en-US" dirty="0"/>
+          </a:p>
+          <a:p>
+            <a:endParaRPr lang="en-US" dirty="0"/>
+          </a:p>
         </p:txBody>
       </p:sp>
       <p:sp>
@@ -707,6 +788,117 @@
 </p:notes>
 </file>
 
+<file path=ppt/notesSlides/notesSlide13.xml><?xml version="1.0" encoding="utf-8"?>
+<p:notes xmlns:a="http://schemas.openxmlformats.org/drawingml/2006/main" xmlns:r="http://schemas.openxmlformats.org/officeDocument/2006/relationships" xmlns:p="http://schemas.openxmlformats.org/presentationml/2006/main">
+  <p:cSld>
+    <p:spTree>
+      <p:nvGrpSpPr>
+        <p:cNvPr id="1" name="">
+          <a:extLst>
+            <a:ext uri="{FF2B5EF4-FFF2-40B4-BE49-F238E27FC236}">
+              <a16:creationId xmlns:a16="http://schemas.microsoft.com/office/drawing/2014/main" id="{AEB868BA-9E24-D29C-481D-39A7F8E4BC56}"/>
+            </a:ext>
+          </a:extLst>
+        </p:cNvPr>
+        <p:cNvGrpSpPr/>
+        <p:nvPr/>
+      </p:nvGrpSpPr>
+      <p:grpSpPr>
+        <a:xfrm>
+          <a:off x="0" y="0"/>
+          <a:ext cx="0" cy="0"/>
+          <a:chOff x="0" y="0"/>
+          <a:chExt cx="0" cy="0"/>
+        </a:xfrm>
+      </p:grpSpPr>
+      <p:sp>
+        <p:nvSpPr>
+          <p:cNvPr id="2" name="Slide Image Placeholder 1">
+            <a:extLst>
+              <a:ext uri="{FF2B5EF4-FFF2-40B4-BE49-F238E27FC236}">
+                <a16:creationId xmlns:a16="http://schemas.microsoft.com/office/drawing/2014/main" id="{CB598079-4109-6A97-1CD5-B7EED9E23E4F}"/>
+              </a:ext>
+            </a:extLst>
+          </p:cNvPr>
+          <p:cNvSpPr>
+            <a:spLocks noGrp="1" noRot="1" noChangeAspect="1"/>
+          </p:cNvSpPr>
+          <p:nvPr>
+            <p:ph type="sldImg"/>
+          </p:nvPr>
+        </p:nvSpPr>
+        <p:spPr/>
+      </p:sp>
+      <p:sp>
+        <p:nvSpPr>
+          <p:cNvPr id="3" name="Notes Placeholder 2">
+            <a:extLst>
+              <a:ext uri="{FF2B5EF4-FFF2-40B4-BE49-F238E27FC236}">
+                <a16:creationId xmlns:a16="http://schemas.microsoft.com/office/drawing/2014/main" id="{A71DE0C1-EDC4-EF74-8DD3-81E4C9B191C9}"/>
+              </a:ext>
+            </a:extLst>
+          </p:cNvPr>
+          <p:cNvSpPr>
+            <a:spLocks noGrp="1"/>
+          </p:cNvSpPr>
+          <p:nvPr>
+            <p:ph type="body" idx="1"/>
+          </p:nvPr>
+        </p:nvSpPr>
+        <p:spPr/>
+        <p:txBody>
+          <a:bodyPr/>
+          <a:lstStyle/>
+          <a:p>
+            <a:r>
+              <a:rPr lang="en-US" dirty="0"/>
+              <a:t>[11:45-12:00] Thank you for your attention, and I'm happy to take any questions.</a:t>
+            </a:r>
+          </a:p>
+        </p:txBody>
+      </p:sp>
+      <p:sp>
+        <p:nvSpPr>
+          <p:cNvPr id="4" name="Slide Number Placeholder 3">
+            <a:extLst>
+              <a:ext uri="{FF2B5EF4-FFF2-40B4-BE49-F238E27FC236}">
+                <a16:creationId xmlns:a16="http://schemas.microsoft.com/office/drawing/2014/main" id="{14630C81-47CA-6BCD-497E-CBB87EE15266}"/>
+              </a:ext>
+            </a:extLst>
+          </p:cNvPr>
+          <p:cNvSpPr>
+            <a:spLocks noGrp="1"/>
+          </p:cNvSpPr>
+          <p:nvPr>
+            <p:ph type="sldNum" sz="quarter" idx="10"/>
+          </p:nvPr>
+        </p:nvSpPr>
+        <p:spPr/>
+        <p:txBody>
+          <a:bodyPr/>
+          <a:lstStyle/>
+          <a:p>
+            <a:fld id="{F7021451-1387-4CA6-816F-3879F97B5CBC}" type="slidenum">
+              <a:rPr lang="en-US"/>
+              <a:t>13</a:t>
+            </a:fld>
+            <a:endParaRPr lang="en-US"/>
+          </a:p>
+        </p:txBody>
+      </p:sp>
+    </p:spTree>
+    <p:extLst>
+      <p:ext uri="{BB962C8B-B14F-4D97-AF65-F5344CB8AC3E}">
+        <p14:creationId xmlns:p14="http://schemas.microsoft.com/office/powerpoint/2010/main" val="1559325621"/>
+      </p:ext>
+    </p:extLst>
+  </p:cSld>
+  <p:clrMapOvr>
+    <a:masterClrMapping/>
+  </p:clrMapOvr>
+</p:notes>
+</file>
+
 <file path=ppt/notesSlides/notesSlide2.xml><?xml version="1.0" encoding="utf-8"?>
 <p:notes xmlns:a="http://schemas.openxmlformats.org/drawingml/2006/main" xmlns:r="http://schemas.openxmlformats.org/officeDocument/2006/relationships" xmlns:p="http://schemas.openxmlformats.org/presentationml/2006/main">
   <p:cSld>
@@ -766,7 +958,10 @@
             <a:endParaRPr lang="en-US" dirty="0"/>
           </a:p>
           <a:p>
-            <a:endParaRPr lang="en-US" dirty="0"/>
+            <a:r>
+              <a:rPr lang="en-US" dirty="0"/>
+              <a:t>- Context; we are talking about securing IT network</a:t>
+            </a:r>
           </a:p>
           <a:p>
             <a:pPr marL="171450" indent="-171450">
@@ -785,7 +980,7 @@
             </a:pPr>
             <a:r>
               <a:rPr lang="en-IT" dirty="0"/>
-              <a:t>Microsegmentation brings benefits (finer control, lateral-movement containment, per-segment policies) </a:t>
+              <a:t>Distributed firewalls brings benefits (finer control, lateral-movement containment, per-segment policies) </a:t>
             </a:r>
           </a:p>
           <a:p>
@@ -1051,7 +1246,7 @@
                 <a:ea typeface="+mn-ea"/>
                 <a:cs typeface="+mn-cs"/>
               </a:rPr>
-              <a:t>Security Requirements =&gt; NSRs: </a:t>
+              <a:t>Security Requirements =&gt; called NSRs in the tool and in the following slides: </a:t>
             </a:r>
             <a:r>
               <a:rPr lang="en-US" sz="1200" dirty="0">
@@ -1444,17 +1639,17 @@
             </a:r>
             <a:r>
               <a:rPr lang="en-GB" dirty="0"/>
-              <a:t>I</a:t>
+              <a:t>is</a:t>
             </a:r>
             <a:r>
               <a:rPr lang="en-IT" dirty="0"/>
-              <a:t> performance. React is much faster compared to the monolithic version, which always starts the configuration over from scratch.</a:t>
+              <a:t> performance. React is much faster compared to the monolithic version, which always compute the configuration from scratch.</a:t>
             </a:r>
           </a:p>
           <a:p>
             <a:r>
               <a:rPr lang="en-IT" dirty="0"/>
-              <a:t>Experimental tests, however, show that this benefit isn't constant and depends on the number of additional requirements to be added. </a:t>
+              <a:t>Experimental tests, however, show that this benefit is not constant and depends on the number of additional requirements to be added. </a:t>
             </a:r>
             <a:r>
               <a:rPr lang="en-GB" dirty="0"/>
@@ -1582,7 +1777,13 @@
   <p:cSld>
     <p:spTree>
       <p:nvGrpSpPr>
-        <p:cNvPr id="1" name=""/>
+        <p:cNvPr id="1" name="">
+          <a:extLst>
+            <a:ext uri="{FF2B5EF4-FFF2-40B4-BE49-F238E27FC236}">
+              <a16:creationId xmlns:a16="http://schemas.microsoft.com/office/drawing/2014/main" id="{6A02FDF2-FFD4-4C23-580B-9696CC23B7AC}"/>
+            </a:ext>
+          </a:extLst>
+        </p:cNvPr>
         <p:cNvGrpSpPr/>
         <p:nvPr/>
       </p:nvGrpSpPr>
@@ -1596,7 +1797,13 @@
       </p:grpSpPr>
       <p:sp>
         <p:nvSpPr>
-          <p:cNvPr id="2" name="Slide Image Placeholder 1"/>
+          <p:cNvPr id="2" name="Slide Image Placeholder 1">
+            <a:extLst>
+              <a:ext uri="{FF2B5EF4-FFF2-40B4-BE49-F238E27FC236}">
+                <a16:creationId xmlns:a16="http://schemas.microsoft.com/office/drawing/2014/main" id="{B0676CB8-D5AB-3FA4-FCE3-3D03EEC0EFA1}"/>
+              </a:ext>
+            </a:extLst>
+          </p:cNvPr>
           <p:cNvSpPr>
             <a:spLocks noGrp="1" noRot="1" noChangeAspect="1"/>
           </p:cNvSpPr>
@@ -1608,7 +1815,13 @@
       </p:sp>
       <p:sp>
         <p:nvSpPr>
-          <p:cNvPr id="3" name="Notes Placeholder 2"/>
+          <p:cNvPr id="3" name="Notes Placeholder 2">
+            <a:extLst>
+              <a:ext uri="{FF2B5EF4-FFF2-40B4-BE49-F238E27FC236}">
+                <a16:creationId xmlns:a16="http://schemas.microsoft.com/office/drawing/2014/main" id="{023B355B-8D84-A6C7-185A-D39F84FA548B}"/>
+              </a:ext>
+            </a:extLst>
+          </p:cNvPr>
           <p:cNvSpPr>
             <a:spLocks noGrp="1"/>
           </p:cNvSpPr>
@@ -1623,38 +1836,16 @@
           <a:p>
             <a:r>
               <a:rPr lang="en-US" dirty="0"/>
-              <a:t>Based on the observation just raised that React VEREFOO performs better only when few novel requirements are added, why not always give it just one at a time? This is the core idea of this thesis.</a:t>
-            </a:r>
-          </a:p>
-          <a:p>
-            <a:pPr marL="0" marR="0" lvl="0" indent="0" algn="l" defTabSz="914400" rtl="0" eaLnBrk="1" fontAlgn="auto" latinLnBrk="0" hangingPunct="1">
-              <a:lnSpc>
-                <a:spcPct val="100000"/>
-              </a:lnSpc>
-              <a:spcBef>
-                <a:spcPts val="0"/>
-              </a:spcBef>
-              <a:spcAft>
-                <a:spcPts val="0"/>
-              </a:spcAft>
-              <a:buClrTx/>
-              <a:buSzTx/>
-              <a:buFontTx/>
-              <a:buNone/>
-              <a:tabLst/>
-              <a:defRPr/>
-            </a:pPr>
+              <a:t>The key idea of this research is then to exploit this very last observation, that React-VEREFOO’s performance are much faster when a small batches of new requirements is provided, to replace the one-shot approach of VEREFOO, with multiple simple calls to React-VEREFOO, with one single requirement each time.</a:t>
+            </a:r>
+          </a:p>
+          <a:p>
+            <a:endParaRPr lang="en-US" dirty="0"/>
+          </a:p>
+          <a:p>
             <a:r>
               <a:rPr lang="en-US" dirty="0"/>
-              <a:t>The iterative version aim to </a:t>
-            </a:r>
-            <a:r>
-              <a:rPr lang="en-US" dirty="0" err="1"/>
-              <a:t>kepp</a:t>
-            </a:r>
-            <a:r>
-              <a:rPr lang="en-US" dirty="0"/>
-              <a:t> the problem minimal at every step, regardless of how many requirements must ultimately be incorporated.</a:t>
+              <a:t>-----------</a:t>
             </a:r>
           </a:p>
           <a:p>
@@ -1666,8 +1857,8 @@
               <a:buChar char="-"/>
             </a:pPr>
             <a:r>
-              <a:rPr lang="en-US" b="1" dirty="0"/>
-              <a:t>if React-VEREFOO is fastest with few new requirements, why not always give it just one at a time? </a:t>
+              <a:rPr lang="en-US" dirty="0"/>
+              <a:t>Use this very last observation =&gt; that React is much faster when a small batch of new requirements is introduced</a:t>
             </a:r>
           </a:p>
           <a:p>
@@ -1677,15 +1868,33 @@
             </a:pPr>
             <a:r>
               <a:rPr lang="en-US" dirty="0"/>
-              <a:t>keeping the problem minimal at every step</a:t>
-            </a:r>
-            <a:endParaRPr lang="en-US" b="1" dirty="0"/>
-          </a:p>
-        </p:txBody>
-      </p:sp>
-      <p:sp>
-        <p:nvSpPr>
-          <p:cNvPr id="4" name="Slide Number Placeholder 3"/>
+              <a:t>To replace the one-shot approach of VEREFOO</a:t>
+            </a:r>
+          </a:p>
+          <a:p>
+            <a:pPr marL="628650" lvl="1" indent="-171450">
+              <a:buFontTx/>
+              <a:buChar char="-"/>
+            </a:pPr>
+            <a:r>
+              <a:rPr lang="en-US" dirty="0"/>
+              <a:t>With multiple simple calls to React version =&gt; adding one single requirement each time</a:t>
+            </a:r>
+          </a:p>
+          <a:p>
+            <a:endParaRPr lang="en-US" dirty="0"/>
+          </a:p>
+        </p:txBody>
+      </p:sp>
+      <p:sp>
+        <p:nvSpPr>
+          <p:cNvPr id="4" name="Slide Number Placeholder 3">
+            <a:extLst>
+              <a:ext uri="{FF2B5EF4-FFF2-40B4-BE49-F238E27FC236}">
+                <a16:creationId xmlns:a16="http://schemas.microsoft.com/office/drawing/2014/main" id="{BB044017-CC37-2D9C-5B33-4BC6F58E4411}"/>
+              </a:ext>
+            </a:extLst>
+          </p:cNvPr>
           <p:cNvSpPr>
             <a:spLocks noGrp="1"/>
           </p:cNvSpPr>
@@ -1709,7 +1918,7 @@
     </p:spTree>
     <p:extLst>
       <p:ext uri="{BB962C8B-B14F-4D97-AF65-F5344CB8AC3E}">
-        <p14:creationId xmlns:p14="http://schemas.microsoft.com/office/powerpoint/2010/main" val="1024086991"/>
+        <p14:creationId xmlns:p14="http://schemas.microsoft.com/office/powerpoint/2010/main" val="119392084"/>
       </p:ext>
     </p:extLst>
   </p:cSld>
@@ -1882,7 +2091,7 @@
                 <a:ea typeface="Courier New" pitchFamily="34" charset="-122"/>
                 <a:cs typeface="Courier New" pitchFamily="34" charset="-120"/>
               </a:rPr>
-              <a:t>assuming P0 as the initial requirements, and An as the additional requirements that we would implement </a:t>
+              <a:t>Reminder: apart from the topology, react-VEREFOO gets two batches of requirement: one of “old" requirements and one of "new" requirements</a:t>
             </a:r>
           </a:p>
           <a:p>
@@ -1912,11 +2121,11 @@
                 <a:ea typeface="Courier New" pitchFamily="34" charset="-122"/>
                 <a:cs typeface="Courier New" pitchFamily="34" charset="-120"/>
               </a:rPr>
-              <a:t>Reminder: react-VEREFOO gets a batch of “old requirements and a batch of new requirements</a:t>
-            </a:r>
-          </a:p>
-          <a:p>
-            <a:pPr marL="171450" marR="0" lvl="0" indent="-171450" algn="l" defTabSz="914400" rtl="0" eaLnBrk="1" fontAlgn="auto" latinLnBrk="0" hangingPunct="1">
+              <a:t>assuming P0 as the initial requirements, and A1, A2, A3 as the additional requirements that we would implement we are just passing different input to React-VEREFOO depending on the iteration:</a:t>
+            </a:r>
+          </a:p>
+          <a:p>
+            <a:pPr marL="628650" marR="0" lvl="1" indent="-171450" algn="l" defTabSz="914400" rtl="0" eaLnBrk="1" fontAlgn="auto" latinLnBrk="0" hangingPunct="1">
               <a:lnSpc>
                 <a:spcPct val="100000"/>
               </a:lnSpc>
@@ -1942,10 +2151,29 @@
                 <a:ea typeface="Courier New" pitchFamily="34" charset="-122"/>
                 <a:cs typeface="Courier New" pitchFamily="34" charset="-120"/>
               </a:rPr>
-              <a:t>As shown in the graphic, with the iterative approach we are manipulating the interaction with React-VEREFOO, just passing one additional requirement at each step: initially the P0 as the “old” requirement and A1 as the new one; in the second </a:t>
-            </a:r>
-            <a:r>
-              <a:rPr lang="en-US" sz="1200" b="0" dirty="0" err="1">
+              <a:t>Iteration1: P0 as the old and A1 as the new</a:t>
+            </a:r>
+          </a:p>
+          <a:p>
+            <a:pPr marL="628650" marR="0" lvl="1" indent="-171450" algn="l" defTabSz="914400" rtl="0" eaLnBrk="1" fontAlgn="auto" latinLnBrk="0" hangingPunct="1">
+              <a:lnSpc>
+                <a:spcPct val="100000"/>
+              </a:lnSpc>
+              <a:spcBef>
+                <a:spcPts val="0"/>
+              </a:spcBef>
+              <a:spcAft>
+                <a:spcPts val="0"/>
+              </a:spcAft>
+              <a:buClrTx/>
+              <a:buSzTx/>
+              <a:buFontTx/>
+              <a:buChar char="-"/>
+              <a:tabLst/>
+              <a:defRPr/>
+            </a:pPr>
+            <a:r>
+              <a:rPr lang="en-US" sz="1200" b="0" dirty="0">
                 <a:solidFill>
                   <a:srgbClr val="1E2761"/>
                 </a:solidFill>
@@ -1953,8 +2181,27 @@
                 <a:ea typeface="Courier New" pitchFamily="34" charset="-122"/>
                 <a:cs typeface="Courier New" pitchFamily="34" charset="-120"/>
               </a:rPr>
-              <a:t>interation</a:t>
-            </a:r>
+              <a:t>Iteration 2: P0 + A1 as the old, and A2 as the new</a:t>
+            </a:r>
+          </a:p>
+          <a:p>
+            <a:pPr marL="628650" marR="0" lvl="1" indent="-171450" algn="l" defTabSz="914400" rtl="0" eaLnBrk="1" fontAlgn="auto" latinLnBrk="0" hangingPunct="1">
+              <a:lnSpc>
+                <a:spcPct val="100000"/>
+              </a:lnSpc>
+              <a:spcBef>
+                <a:spcPts val="0"/>
+              </a:spcBef>
+              <a:spcAft>
+                <a:spcPts val="0"/>
+              </a:spcAft>
+              <a:buClrTx/>
+              <a:buSzTx/>
+              <a:buFontTx/>
+              <a:buChar char="-"/>
+              <a:tabLst/>
+              <a:defRPr/>
+            </a:pPr>
             <a:r>
               <a:rPr lang="en-US" sz="1200" b="0" dirty="0">
                 <a:solidFill>
@@ -1964,7 +2211,7 @@
                 <a:ea typeface="Courier New" pitchFamily="34" charset="-122"/>
                 <a:cs typeface="Courier New" pitchFamily="34" charset="-120"/>
               </a:rPr>
-              <a:t>, P0 + A1 as the old (already implemented) and A2 as the new requirement; and so on</a:t>
+              <a:t>And so on for all the requirements we want to enforce	</a:t>
             </a:r>
           </a:p>
           <a:p>
@@ -1985,41 +2232,39 @@
               <a:tabLst/>
               <a:defRPr/>
             </a:pPr>
-            <a:endParaRPr lang="en-US" sz="1200" b="1" dirty="0">
-              <a:solidFill>
-                <a:srgbClr val="1E2761"/>
-              </a:solidFill>
-              <a:latin typeface="Courier New" pitchFamily="34" charset="0"/>
-              <a:ea typeface="Courier New" pitchFamily="34" charset="-122"/>
-              <a:cs typeface="Courier New" pitchFamily="34" charset="-120"/>
-            </a:endParaRPr>
-          </a:p>
-          <a:p>
-            <a:pPr marL="0" marR="0" lvl="0" indent="0" algn="l" defTabSz="914400" rtl="0" eaLnBrk="1" fontAlgn="auto" latinLnBrk="0" hangingPunct="1">
-              <a:lnSpc>
-                <a:spcPct val="100000"/>
-              </a:lnSpc>
-              <a:spcBef>
-                <a:spcPts val="0"/>
-              </a:spcBef>
-              <a:spcAft>
-                <a:spcPts val="0"/>
-              </a:spcAft>
-              <a:buClrTx/>
-              <a:buSzTx/>
-              <a:buFontTx/>
-              <a:buNone/>
-              <a:tabLst/>
-              <a:defRPr/>
-            </a:pPr>
-            <a:endParaRPr lang="en-US" sz="1200" b="1" dirty="0">
-              <a:solidFill>
-                <a:srgbClr val="1E2761"/>
-              </a:solidFill>
-              <a:latin typeface="Courier New" pitchFamily="34" charset="0"/>
-              <a:ea typeface="Courier New" pitchFamily="34" charset="-122"/>
-              <a:cs typeface="Courier New" pitchFamily="34" charset="-120"/>
-            </a:endParaRPr>
+            <a:r>
+              <a:rPr lang="en-US" sz="1200" b="1" dirty="0">
+                <a:solidFill>
+                  <a:srgbClr val="1E2761"/>
+                </a:solidFill>
+                <a:latin typeface="Courier New" pitchFamily="34" charset="0"/>
+                <a:ea typeface="Courier New" pitchFamily="34" charset="-122"/>
+                <a:cs typeface="Courier New" pitchFamily="34" charset="-120"/>
+              </a:rPr>
+              <a:t>- Additional note: correctness is guaranteed by React-VEREFOO itself because we are only manipulating the </a:t>
+            </a:r>
+            <a:r>
+              <a:rPr lang="en-US" sz="1200" b="1" dirty="0" err="1">
+                <a:solidFill>
+                  <a:srgbClr val="1E2761"/>
+                </a:solidFill>
+                <a:latin typeface="Courier New" pitchFamily="34" charset="0"/>
+                <a:ea typeface="Courier New" pitchFamily="34" charset="-122"/>
+                <a:cs typeface="Courier New" pitchFamily="34" charset="-120"/>
+              </a:rPr>
+              <a:t>interation</a:t>
+            </a:r>
+            <a:r>
+              <a:rPr lang="en-US" sz="1200" b="1" dirty="0">
+                <a:solidFill>
+                  <a:srgbClr val="1E2761"/>
+                </a:solidFill>
+                <a:latin typeface="Courier New" pitchFamily="34" charset="0"/>
+                <a:ea typeface="Courier New" pitchFamily="34" charset="-122"/>
+                <a:cs typeface="Courier New" pitchFamily="34" charset="-120"/>
+              </a:rPr>
+              <a:t> with it, not creating a brand new tool of it</a:t>
+            </a:r>
           </a:p>
         </p:txBody>
       </p:sp>
@@ -4292,127 +4537,6 @@
           </a:prstGeom>
         </p:spPr>
       </p:pic>
-      <p:sp>
-        <p:nvSpPr>
-          <p:cNvPr id="10" name="Shape 2">
-            <a:extLst>
-              <a:ext uri="{FF2B5EF4-FFF2-40B4-BE49-F238E27FC236}">
-                <a16:creationId xmlns:a16="http://schemas.microsoft.com/office/drawing/2014/main" id="{A57A5124-B037-0B59-98AB-3B917993917F}"/>
-              </a:ext>
-            </a:extLst>
-          </p:cNvPr>
-          <p:cNvSpPr/>
-          <p:nvPr/>
-        </p:nvSpPr>
-        <p:spPr>
-          <a:xfrm>
-            <a:off x="6217920" y="4667198"/>
-            <a:ext cx="5394960" cy="1230682"/>
-          </a:xfrm>
-          <a:prstGeom prst="roundRect">
-            <a:avLst>
-              <a:gd name="adj" fmla="val 5000"/>
-            </a:avLst>
-          </a:prstGeom>
-          <a:solidFill>
-            <a:srgbClr val="F2F5FC"/>
-          </a:solidFill>
-          <a:ln/>
-        </p:spPr>
-        <p:txBody>
-          <a:bodyPr/>
-          <a:lstStyle/>
-          <a:p>
-            <a:endParaRPr lang="en-IT"/>
-          </a:p>
-        </p:txBody>
-      </p:sp>
-      <p:sp>
-        <p:nvSpPr>
-          <p:cNvPr id="12" name="TextBox 11">
-            <a:extLst>
-              <a:ext uri="{FF2B5EF4-FFF2-40B4-BE49-F238E27FC236}">
-                <a16:creationId xmlns:a16="http://schemas.microsoft.com/office/drawing/2014/main" id="{D41C21AE-E1B1-0CC8-D329-8F4533C03047}"/>
-              </a:ext>
-            </a:extLst>
-          </p:cNvPr>
-          <p:cNvSpPr txBox="1"/>
-          <p:nvPr/>
-        </p:nvSpPr>
-        <p:spPr>
-          <a:xfrm>
-            <a:off x="6338847" y="4759107"/>
-            <a:ext cx="5107386" cy="1016817"/>
-          </a:xfrm>
-          <a:prstGeom prst="rect">
-            <a:avLst/>
-          </a:prstGeom>
-          <a:noFill/>
-        </p:spPr>
-        <p:txBody>
-          <a:bodyPr wrap="square">
-            <a:spAutoFit/>
-          </a:bodyPr>
-          <a:lstStyle/>
-          <a:p>
-            <a:r>
-              <a:rPr lang="en-US" b="1" i="1" dirty="0">
-                <a:solidFill>
-                  <a:schemeClr val="bg2">
-                    <a:lumMod val="50000"/>
-                  </a:schemeClr>
-                </a:solidFill>
-                <a:latin typeface="Calibri" pitchFamily="34" charset="0"/>
-                <a:cs typeface="Calibri" pitchFamily="34" charset="-120"/>
-              </a:rPr>
-              <a:t>“An incremental approach to automatic firewall configuration.”</a:t>
-            </a:r>
-          </a:p>
-          <a:p>
-            <a:pPr>
-              <a:lnSpc>
-                <a:spcPct val="200000"/>
-              </a:lnSpc>
-            </a:pPr>
-            <a:r>
-              <a:rPr lang="en-US" sz="1400" i="1" dirty="0">
-                <a:solidFill>
-                  <a:schemeClr val="bg2">
-                    <a:lumMod val="50000"/>
-                  </a:schemeClr>
-                </a:solidFill>
-                <a:latin typeface="Calibri" pitchFamily="34" charset="0"/>
-                <a:cs typeface="Calibri" pitchFamily="34" charset="-120"/>
-              </a:rPr>
-              <a:t>F. Del Ministro, F. Valenza, D. </a:t>
-            </a:r>
-            <a:r>
-              <a:rPr lang="en-US" sz="1400" i="1" dirty="0" err="1">
-                <a:solidFill>
-                  <a:schemeClr val="bg2">
-                    <a:lumMod val="50000"/>
-                  </a:schemeClr>
-                </a:solidFill>
-                <a:latin typeface="Calibri" pitchFamily="34" charset="0"/>
-                <a:cs typeface="Calibri" pitchFamily="34" charset="-120"/>
-              </a:rPr>
-              <a:t>Bringhenti</a:t>
-            </a:r>
-            <a:r>
-              <a:rPr lang="en-US" sz="1400" i="1" dirty="0">
-                <a:solidFill>
-                  <a:schemeClr val="bg2">
-                    <a:lumMod val="50000"/>
-                  </a:schemeClr>
-                </a:solidFill>
-                <a:latin typeface="Calibri" pitchFamily="34" charset="0"/>
-                <a:cs typeface="Calibri" pitchFamily="34" charset="-120"/>
-              </a:rPr>
-              <a:t>, F. Pizzato, R. Sisto</a:t>
-            </a:r>
-          </a:p>
-        </p:txBody>
-      </p:sp>
     </p:spTree>
     <p:extLst>
       <p:ext uri="{BB962C8B-B14F-4D97-AF65-F5344CB8AC3E}">
@@ -4569,7 +4693,13 @@
       </p:sp>
       <p:pic>
         <p:nvPicPr>
-          <p:cNvPr id="5" name="Image 0" descr="imgs/logo.png"/>
+          <p:cNvPr id="7" name="Picture 6">
+            <a:extLst>
+              <a:ext uri="{FF2B5EF4-FFF2-40B4-BE49-F238E27FC236}">
+                <a16:creationId xmlns:a16="http://schemas.microsoft.com/office/drawing/2014/main" id="{C6797A01-CFA7-855C-D729-938649400F50}"/>
+              </a:ext>
+            </a:extLst>
+          </p:cNvPr>
           <p:cNvPicPr>
             <a:picLocks noChangeAspect="1"/>
           </p:cNvPicPr>
@@ -4583,6 +4713,191 @@
         </p:blipFill>
         <p:spPr>
           <a:xfrm>
+            <a:off x="5318440" y="5785511"/>
+            <a:ext cx="1552071" cy="681937"/>
+          </a:xfrm>
+          <a:prstGeom prst="rect">
+            <a:avLst/>
+          </a:prstGeom>
+        </p:spPr>
+      </p:pic>
+    </p:spTree>
+  </p:cSld>
+  <p:clrMapOvr>
+    <a:masterClrMapping/>
+  </p:clrMapOvr>
+</p:sld>
+</file>
+
+<file path=ppt/slides/slide13.xml><?xml version="1.0" encoding="utf-8"?>
+<p:sld xmlns:a="http://schemas.openxmlformats.org/drawingml/2006/main" xmlns:r="http://schemas.openxmlformats.org/officeDocument/2006/relationships" xmlns:p="http://schemas.openxmlformats.org/presentationml/2006/main">
+  <p:cSld>
+    <p:spTree>
+      <p:nvGrpSpPr>
+        <p:cNvPr id="1" name="">
+          <a:extLst>
+            <a:ext uri="{FF2B5EF4-FFF2-40B4-BE49-F238E27FC236}">
+              <a16:creationId xmlns:a16="http://schemas.microsoft.com/office/drawing/2014/main" id="{A7E8FCC2-7343-E047-FDE7-91F5E11AF01F}"/>
+            </a:ext>
+          </a:extLst>
+        </p:cNvPr>
+        <p:cNvGrpSpPr/>
+        <p:nvPr/>
+      </p:nvGrpSpPr>
+      <p:grpSpPr>
+        <a:xfrm>
+          <a:off x="0" y="0"/>
+          <a:ext cx="0" cy="0"/>
+          <a:chOff x="0" y="0"/>
+          <a:chExt cx="0" cy="0"/>
+        </a:xfrm>
+      </p:grpSpPr>
+      <p:sp>
+        <p:nvSpPr>
+          <p:cNvPr id="2" name="Shape 0">
+            <a:extLst>
+              <a:ext uri="{FF2B5EF4-FFF2-40B4-BE49-F238E27FC236}">
+                <a16:creationId xmlns:a16="http://schemas.microsoft.com/office/drawing/2014/main" id="{E14A2165-8D1C-930A-0D50-316EE51AD368}"/>
+              </a:ext>
+            </a:extLst>
+          </p:cNvPr>
+          <p:cNvSpPr/>
+          <p:nvPr/>
+        </p:nvSpPr>
+        <p:spPr>
+          <a:xfrm>
+            <a:off x="9692640" y="-1463040"/>
+            <a:ext cx="4206240" cy="4206240"/>
+          </a:xfrm>
+          <a:prstGeom prst="ellipse">
+            <a:avLst/>
+          </a:prstGeom>
+          <a:solidFill>
+            <a:schemeClr val="accent1">
+              <a:lumMod val="20000"/>
+              <a:lumOff val="80000"/>
+            </a:schemeClr>
+          </a:solidFill>
+          <a:ln/>
+        </p:spPr>
+        <p:txBody>
+          <a:bodyPr/>
+          <a:lstStyle/>
+          <a:p>
+            <a:endParaRPr lang="en-IT"/>
+          </a:p>
+        </p:txBody>
+      </p:sp>
+      <p:sp>
+        <p:nvSpPr>
+          <p:cNvPr id="3" name="Shape 1">
+            <a:extLst>
+              <a:ext uri="{FF2B5EF4-FFF2-40B4-BE49-F238E27FC236}">
+                <a16:creationId xmlns:a16="http://schemas.microsoft.com/office/drawing/2014/main" id="{94E9DE65-6DF2-9BD1-BB18-1A9CC80C40BE}"/>
+              </a:ext>
+            </a:extLst>
+          </p:cNvPr>
+          <p:cNvSpPr/>
+          <p:nvPr/>
+        </p:nvSpPr>
+        <p:spPr>
+          <a:xfrm>
+            <a:off x="-1645920" y="4389120"/>
+            <a:ext cx="3474720" cy="3474720"/>
+          </a:xfrm>
+          <a:prstGeom prst="ellipse">
+            <a:avLst/>
+          </a:prstGeom>
+          <a:solidFill>
+            <a:schemeClr val="accent1">
+              <a:lumMod val="20000"/>
+              <a:lumOff val="80000"/>
+            </a:schemeClr>
+          </a:solidFill>
+          <a:ln/>
+        </p:spPr>
+        <p:txBody>
+          <a:bodyPr/>
+          <a:lstStyle/>
+          <a:p>
+            <a:endParaRPr lang="en-IT"/>
+          </a:p>
+        </p:txBody>
+      </p:sp>
+      <p:sp>
+        <p:nvSpPr>
+          <p:cNvPr id="4" name="Text 2">
+            <a:extLst>
+              <a:ext uri="{FF2B5EF4-FFF2-40B4-BE49-F238E27FC236}">
+                <a16:creationId xmlns:a16="http://schemas.microsoft.com/office/drawing/2014/main" id="{318D860D-E4BE-80C2-AB5F-7C06B432ADA9}"/>
+              </a:ext>
+            </a:extLst>
+          </p:cNvPr>
+          <p:cNvSpPr txBox="1"/>
+          <p:nvPr/>
+        </p:nvSpPr>
+        <p:spPr>
+          <a:xfrm>
+            <a:off x="0" y="2651760"/>
+            <a:ext cx="12188952" cy="1554480"/>
+          </a:xfrm>
+          <a:prstGeom prst="rect">
+            <a:avLst/>
+          </a:prstGeom>
+          <a:noFill/>
+          <a:ln/>
+        </p:spPr>
+        <p:txBody>
+          <a:bodyPr wrap="square" lIns="0" tIns="0" rIns="0" bIns="0" rtlCol="0" anchor="ctr"/>
+          <a:lstStyle/>
+          <a:p>
+            <a:pPr marL="0" indent="0" algn="ctr">
+              <a:lnSpc>
+                <a:spcPct val="110000"/>
+              </a:lnSpc>
+              <a:buNone/>
+            </a:pPr>
+            <a:r>
+              <a:rPr lang="en-US" sz="3400" b="1" dirty="0">
+                <a:solidFill>
+                  <a:srgbClr val="002060"/>
+                </a:solidFill>
+                <a:latin typeface="Cambria" pitchFamily="34" charset="0"/>
+                <a:ea typeface="Cambria" pitchFamily="34" charset="-122"/>
+                <a:cs typeface="Cambria" pitchFamily="34" charset="-120"/>
+              </a:rPr>
+              <a:t>ANNEX</a:t>
+            </a:r>
+            <a:endParaRPr lang="en-US" sz="3400" dirty="0">
+              <a:solidFill>
+                <a:srgbClr val="002060"/>
+              </a:solidFill>
+            </a:endParaRPr>
+          </a:p>
+        </p:txBody>
+      </p:sp>
+      <p:pic>
+        <p:nvPicPr>
+          <p:cNvPr id="5" name="Image 0" descr="imgs/logo.png">
+            <a:extLst>
+              <a:ext uri="{FF2B5EF4-FFF2-40B4-BE49-F238E27FC236}">
+                <a16:creationId xmlns:a16="http://schemas.microsoft.com/office/drawing/2014/main" id="{028FA037-5B76-B8C5-86F9-5C631FB5B440}"/>
+              </a:ext>
+            </a:extLst>
+          </p:cNvPr>
+          <p:cNvPicPr>
+            <a:picLocks noChangeAspect="1"/>
+          </p:cNvPicPr>
+          <p:nvPr/>
+        </p:nvPicPr>
+        <p:blipFill>
+          <a:blip r:embed="rId3"/>
+          <a:stretch>
+            <a:fillRect/>
+          </a:stretch>
+        </p:blipFill>
+        <p:spPr>
+          <a:xfrm>
             <a:off x="5317236" y="5806440"/>
             <a:ext cx="1554480" cy="683481"/>
           </a:xfrm>
@@ -4592,6 +4907,11 @@
         </p:spPr>
       </p:pic>
     </p:spTree>
+    <p:extLst>
+      <p:ext uri="{BB962C8B-B14F-4D97-AF65-F5344CB8AC3E}">
+        <p14:creationId xmlns:p14="http://schemas.microsoft.com/office/powerpoint/2010/main" val="4182727855"/>
+      </p:ext>
+    </p:extLst>
   </p:cSld>
   <p:clrMapOvr>
     <a:masterClrMapping/>
@@ -4700,7 +5020,7 @@
                 <a:latin typeface="Calibri" pitchFamily="34" charset="0"/>
                 <a:cs typeface="Calibri" pitchFamily="34" charset="-120"/>
               </a:rPr>
-              <a:t>Growing network complexity is driving a shift to distributed firewalls (microsegmentation)</a:t>
+              <a:t>Growing network complexity is driving a shift to distributed firewalls</a:t>
             </a:r>
           </a:p>
           <a:p>
@@ -4765,7 +5085,7 @@
                 <a:ea typeface="Calibri" pitchFamily="34" charset="-122"/>
                 <a:cs typeface="Calibri" pitchFamily="34" charset="-120"/>
               </a:rPr>
-              <a:t>: more instances an rules to mana means, more chances for conflicts; manual configuration is error-prone, with no guarantees of correctness</a:t>
+              <a:t>: more instances an rules to configure means more chances for conflicts; manual configuration is error-prone, with no guarantees of correctness</a:t>
             </a:r>
             <a:endParaRPr lang="en-US" sz="2000" dirty="0"/>
           </a:p>
@@ -4988,7 +5308,7 @@
                   <a:ea typeface="Calibri" pitchFamily="34" charset="-122"/>
                   <a:cs typeface="Calibri" pitchFamily="34" charset="-120"/>
                 </a:rPr>
-                <a:t>Distributed firewalls (microsegmentation)</a:t>
+                <a:t>Distributed firewalls</a:t>
               </a:r>
               <a:endParaRPr lang="en-US" sz="1200" dirty="0">
                 <a:solidFill>
@@ -5183,7 +5503,7 @@
         <p:spPr>
           <a:xfrm>
             <a:off x="731520" y="1386840"/>
-            <a:ext cx="10469880" cy="1228898"/>
+            <a:ext cx="10469880" cy="693996"/>
           </a:xfrm>
           <a:prstGeom prst="rect">
             <a:avLst/>
@@ -5209,7 +5529,7 @@
                 <a:latin typeface="Calibri" pitchFamily="34" charset="0"/>
                 <a:cs typeface="Calibri" pitchFamily="34" charset="-120"/>
               </a:rPr>
-              <a:t>Automatically places and configures firewalls for a given network, formally guaranteeing correctness and optimality</a:t>
+              <a:t>VEREFOO is an automatic tool to that allocates and configures firewalls for a given network, formally guaranteeing correctness and optimality</a:t>
             </a:r>
             <a:endParaRPr lang="en-US" sz="2000" dirty="0">
               <a:solidFill>
@@ -5498,7 +5818,7 @@
                 <a:latin typeface="Calibri" pitchFamily="34" charset="0"/>
                 <a:cs typeface="Calibri" pitchFamily="34" charset="-120"/>
               </a:rPr>
-              <a:t>Automatically reconfigures an existing firewall configuration when new requirements are introduced, avoiding a full re-computation from scratch </a:t>
+              <a:t>React-VEREFOO automatically reconfigures an existing firewall configuration when new requirements are introduced, avoiding a full re-computation from scratch </a:t>
             </a:r>
           </a:p>
         </p:txBody>
@@ -5742,7 +6062,7 @@
 
 <file path=ppt/slides/slide5.xml><?xml version="1.0" encoding="utf-8"?>
 <p:sld xmlns:a="http://schemas.openxmlformats.org/drawingml/2006/main" xmlns:r="http://schemas.openxmlformats.org/officeDocument/2006/relationships" xmlns:p="http://schemas.openxmlformats.org/presentationml/2006/main">
-  <p:cSld name="Slide 5">
+  <p:cSld>
     <p:bg>
       <p:bgPr>
         <a:solidFill>
@@ -5753,7 +6073,13 @@
     </p:bg>
     <p:spTree>
       <p:nvGrpSpPr>
-        <p:cNvPr id="1" name=""/>
+        <p:cNvPr id="1" name="">
+          <a:extLst>
+            <a:ext uri="{FF2B5EF4-FFF2-40B4-BE49-F238E27FC236}">
+              <a16:creationId xmlns:a16="http://schemas.microsoft.com/office/drawing/2014/main" id="{2E14C5C5-4AD7-62A9-6DA0-992094E7EE05}"/>
+            </a:ext>
+          </a:extLst>
+        </p:cNvPr>
         <p:cNvGrpSpPr/>
         <p:nvPr/>
       </p:nvGrpSpPr>
@@ -5767,7 +6093,13 @@
       </p:grpSpPr>
       <p:sp>
         <p:nvSpPr>
-          <p:cNvPr id="2" name="Shape 0"/>
+          <p:cNvPr id="2" name="Shape 0">
+            <a:extLst>
+              <a:ext uri="{FF2B5EF4-FFF2-40B4-BE49-F238E27FC236}">
+                <a16:creationId xmlns:a16="http://schemas.microsoft.com/office/drawing/2014/main" id="{1343B032-9245-C132-5F11-5AB7E683E2FF}"/>
+              </a:ext>
+            </a:extLst>
+          </p:cNvPr>
           <p:cNvSpPr/>
           <p:nvPr/>
         </p:nvSpPr>
@@ -5794,13 +6126,19 @@
       </p:sp>
       <p:sp>
         <p:nvSpPr>
-          <p:cNvPr id="3" name="Text 1"/>
+          <p:cNvPr id="3" name="Text 1">
+            <a:extLst>
+              <a:ext uri="{FF2B5EF4-FFF2-40B4-BE49-F238E27FC236}">
+                <a16:creationId xmlns:a16="http://schemas.microsoft.com/office/drawing/2014/main" id="{1DBA9084-20F0-8708-6D98-3075662921A9}"/>
+              </a:ext>
+            </a:extLst>
+          </p:cNvPr>
           <p:cNvSpPr txBox="1"/>
           <p:nvPr/>
         </p:nvSpPr>
         <p:spPr>
           <a:xfrm>
-            <a:off x="731520" y="640080"/>
+            <a:off x="731520" y="960120"/>
             <a:ext cx="7315200" cy="365760"/>
           </a:xfrm>
           <a:prstGeom prst="rect">
@@ -5825,7 +6163,7 @@
                 <a:ea typeface="Calibri" pitchFamily="34" charset="-122"/>
                 <a:cs typeface="Calibri" pitchFamily="34" charset="-120"/>
               </a:rPr>
-              <a:t>RESEARCH QUESTION</a:t>
+              <a:t>KEY IDEA</a:t>
             </a:r>
             <a:endParaRPr lang="en-US" sz="1400" dirty="0"/>
           </a:p>
@@ -5833,14 +6171,20 @@
       </p:sp>
       <p:sp>
         <p:nvSpPr>
-          <p:cNvPr id="4" name="Text 2"/>
+          <p:cNvPr id="4" name="Text 2">
+            <a:extLst>
+              <a:ext uri="{FF2B5EF4-FFF2-40B4-BE49-F238E27FC236}">
+                <a16:creationId xmlns:a16="http://schemas.microsoft.com/office/drawing/2014/main" id="{D17BD8F9-8CCB-9E15-F5E6-9A4C371BC502}"/>
+              </a:ext>
+            </a:extLst>
+          </p:cNvPr>
           <p:cNvSpPr txBox="1"/>
           <p:nvPr/>
         </p:nvSpPr>
         <p:spPr>
           <a:xfrm>
-            <a:off x="731520" y="1097280"/>
-            <a:ext cx="10515600" cy="1645920"/>
+            <a:off x="731520" y="1417320"/>
+            <a:ext cx="10698480" cy="1234440"/>
           </a:xfrm>
           <a:prstGeom prst="rect">
             <a:avLst/>
@@ -5852,12 +6196,33 @@
           <a:bodyPr wrap="square" lIns="0" tIns="0" rIns="0" bIns="0" rtlCol="0" anchor="ctr"/>
           <a:lstStyle/>
           <a:p>
-            <a:pPr marL="0" indent="0">
-              <a:lnSpc>
-                <a:spcPct val="115000"/>
-              </a:lnSpc>
-              <a:buNone/>
-            </a:pPr>
+            <a:r>
+              <a:rPr lang="en-IT" sz="3000" b="1" dirty="0">
+                <a:solidFill>
+                  <a:srgbClr val="FFFFFF"/>
+                </a:solidFill>
+                <a:latin typeface="Cambria" pitchFamily="34" charset="0"/>
+              </a:rPr>
+              <a:t>Replace the </a:t>
+            </a:r>
+            <a:r>
+              <a:rPr lang="en-IT" sz="3000" b="1" i="1" dirty="0">
+                <a:solidFill>
+                  <a:srgbClr val="FFFFFF"/>
+                </a:solidFill>
+                <a:latin typeface="Cambria" pitchFamily="34" charset="0"/>
+              </a:rPr>
+              <a:t>one-shot</a:t>
+            </a:r>
+            <a:r>
+              <a:rPr lang="en-IT" sz="3000" b="1" dirty="0">
+                <a:solidFill>
+                  <a:srgbClr val="FFFFFF"/>
+                </a:solidFill>
+                <a:latin typeface="Cambria" pitchFamily="34" charset="0"/>
+              </a:rPr>
+              <a:t> approach of VEREFOO with a sequence of calls to React-VEREFOO </a:t>
+            </a:r>
             <a:r>
               <a:rPr lang="en-US" sz="3000" b="1" dirty="0">
                 <a:solidFill>
@@ -5867,7 +6232,7 @@
                 <a:ea typeface="Cambria" pitchFamily="34" charset="-122"/>
                 <a:cs typeface="Cambria" pitchFamily="34" charset="-120"/>
               </a:rPr>
-              <a:t>If React-VEREFOO is fastest when only a few requirements change — why not always give it just one?</a:t>
+              <a:t>— each one adding one single requirement.</a:t>
             </a:r>
             <a:endParaRPr lang="en-US" sz="3000" dirty="0"/>
           </a:p>
@@ -5875,7 +6240,13 @@
       </p:sp>
       <p:sp>
         <p:nvSpPr>
-          <p:cNvPr id="5" name="Shape 3"/>
+          <p:cNvPr id="5" name="Shape 3">
+            <a:extLst>
+              <a:ext uri="{FF2B5EF4-FFF2-40B4-BE49-F238E27FC236}">
+                <a16:creationId xmlns:a16="http://schemas.microsoft.com/office/drawing/2014/main" id="{2D55E659-0A3A-0C08-77D6-AE981C2E51BD}"/>
+              </a:ext>
+            </a:extLst>
+          </p:cNvPr>
           <p:cNvSpPr/>
           <p:nvPr/>
         </p:nvSpPr>
@@ -5904,7 +6275,13 @@
       </p:sp>
       <p:sp>
         <p:nvSpPr>
-          <p:cNvPr id="6" name="Text 4"/>
+          <p:cNvPr id="6" name="Text 4">
+            <a:extLst>
+              <a:ext uri="{FF2B5EF4-FFF2-40B4-BE49-F238E27FC236}">
+                <a16:creationId xmlns:a16="http://schemas.microsoft.com/office/drawing/2014/main" id="{A0B41F20-F402-ECAD-0C0E-00A6E28FD408}"/>
+              </a:ext>
+            </a:extLst>
+          </p:cNvPr>
           <p:cNvSpPr txBox="1"/>
           <p:nvPr/>
         </p:nvSpPr>
@@ -5935,7 +6312,7 @@
                 <a:ea typeface="Calibri" pitchFamily="34" charset="-122"/>
                 <a:cs typeface="Calibri" pitchFamily="34" charset="-120"/>
               </a:rPr>
-              <a:t>Standard React-VEREFOO</a:t>
+              <a:t>Vanilla VEREFOO</a:t>
             </a:r>
             <a:endParaRPr lang="en-US" sz="1600" dirty="0"/>
           </a:p>
@@ -5943,7 +6320,13 @@
       </p:sp>
       <p:sp>
         <p:nvSpPr>
-          <p:cNvPr id="7" name="Shape 5"/>
+          <p:cNvPr id="7" name="Shape 5">
+            <a:extLst>
+              <a:ext uri="{FF2B5EF4-FFF2-40B4-BE49-F238E27FC236}">
+                <a16:creationId xmlns:a16="http://schemas.microsoft.com/office/drawing/2014/main" id="{896C35BD-F93B-DD55-7540-F2E050086491}"/>
+              </a:ext>
+            </a:extLst>
+          </p:cNvPr>
           <p:cNvSpPr/>
           <p:nvPr/>
         </p:nvSpPr>
@@ -5977,7 +6360,13 @@
       </p:sp>
       <p:sp>
         <p:nvSpPr>
-          <p:cNvPr id="8" name="Text 6"/>
+          <p:cNvPr id="8" name="Text 6">
+            <a:extLst>
+              <a:ext uri="{FF2B5EF4-FFF2-40B4-BE49-F238E27FC236}">
+                <a16:creationId xmlns:a16="http://schemas.microsoft.com/office/drawing/2014/main" id="{FBC5AAE4-4F1A-8027-F613-600F8EF9D2FC}"/>
+              </a:ext>
+            </a:extLst>
+          </p:cNvPr>
           <p:cNvSpPr txBox="1"/>
           <p:nvPr/>
         </p:nvSpPr>
@@ -6008,7 +6397,29 @@
                 <a:ea typeface="Calibri" pitchFamily="34" charset="-122"/>
                 <a:cs typeface="Calibri" pitchFamily="34" charset="-120"/>
               </a:rPr>
-              <a:t>large batch of new NSRs</a:t>
+              <a:t>large batch of </a:t>
+            </a:r>
+            <a:r>
+              <a:rPr lang="en-US" sz="1400" b="1" dirty="0">
+                <a:solidFill>
+                  <a:srgbClr val="FFFFFF"/>
+                </a:solidFill>
+                <a:latin typeface="Calibri" pitchFamily="34" charset="0"/>
+                <a:ea typeface="Calibri" pitchFamily="34" charset="-122"/>
+                <a:cs typeface="Calibri" pitchFamily="34" charset="-120"/>
+              </a:rPr>
+              <a:t>N</a:t>
+            </a:r>
+            <a:r>
+              <a:rPr lang="en-US" sz="1400" dirty="0">
+                <a:solidFill>
+                  <a:srgbClr val="FFFFFF"/>
+                </a:solidFill>
+                <a:latin typeface="Calibri" pitchFamily="34" charset="0"/>
+                <a:ea typeface="Calibri" pitchFamily="34" charset="-122"/>
+                <a:cs typeface="Calibri" pitchFamily="34" charset="-120"/>
+              </a:rPr>
+              <a:t> NSRs</a:t>
             </a:r>
             <a:endParaRPr lang="en-US" sz="1400" dirty="0"/>
           </a:p>
@@ -6016,7 +6427,13 @@
       </p:sp>
       <p:sp>
         <p:nvSpPr>
-          <p:cNvPr id="9" name="Text 7"/>
+          <p:cNvPr id="9" name="Text 7">
+            <a:extLst>
+              <a:ext uri="{FF2B5EF4-FFF2-40B4-BE49-F238E27FC236}">
+                <a16:creationId xmlns:a16="http://schemas.microsoft.com/office/drawing/2014/main" id="{C7286D86-C0F3-EC09-A7E3-2116BDC873BB}"/>
+              </a:ext>
+            </a:extLst>
+          </p:cNvPr>
           <p:cNvSpPr txBox="1"/>
           <p:nvPr/>
         </p:nvSpPr>
@@ -6059,7 +6476,13 @@
       </p:sp>
       <p:sp>
         <p:nvSpPr>
-          <p:cNvPr id="10" name="Text 8"/>
+          <p:cNvPr id="10" name="Text 8">
+            <a:extLst>
+              <a:ext uri="{FF2B5EF4-FFF2-40B4-BE49-F238E27FC236}">
+                <a16:creationId xmlns:a16="http://schemas.microsoft.com/office/drawing/2014/main" id="{84F8B2D1-EAA9-17F4-D65C-6CC5F1A9C4A5}"/>
+              </a:ext>
+            </a:extLst>
+          </p:cNvPr>
           <p:cNvSpPr txBox="1"/>
           <p:nvPr/>
         </p:nvSpPr>
@@ -6098,7 +6521,13 @@
       </p:sp>
       <p:sp>
         <p:nvSpPr>
-          <p:cNvPr id="11" name="Shape 9"/>
+          <p:cNvPr id="11" name="Shape 9">
+            <a:extLst>
+              <a:ext uri="{FF2B5EF4-FFF2-40B4-BE49-F238E27FC236}">
+                <a16:creationId xmlns:a16="http://schemas.microsoft.com/office/drawing/2014/main" id="{B46588B5-B82F-A8E6-2FCB-708F13632D30}"/>
+              </a:ext>
+            </a:extLst>
+          </p:cNvPr>
           <p:cNvSpPr/>
           <p:nvPr/>
         </p:nvSpPr>
@@ -6127,7 +6556,13 @@
       </p:sp>
       <p:sp>
         <p:nvSpPr>
-          <p:cNvPr id="12" name="Text 10"/>
+          <p:cNvPr id="12" name="Text 10">
+            <a:extLst>
+              <a:ext uri="{FF2B5EF4-FFF2-40B4-BE49-F238E27FC236}">
+                <a16:creationId xmlns:a16="http://schemas.microsoft.com/office/drawing/2014/main" id="{F33BF1C5-E919-571E-C4DA-DE76F0D81557}"/>
+              </a:ext>
+            </a:extLst>
+          </p:cNvPr>
           <p:cNvSpPr txBox="1"/>
           <p:nvPr/>
         </p:nvSpPr>
@@ -6170,13 +6605,19 @@
       </p:sp>
       <p:sp>
         <p:nvSpPr>
-          <p:cNvPr id="13" name="Shape 11"/>
+          <p:cNvPr id="13" name="Shape 11">
+            <a:extLst>
+              <a:ext uri="{FF2B5EF4-FFF2-40B4-BE49-F238E27FC236}">
+                <a16:creationId xmlns:a16="http://schemas.microsoft.com/office/drawing/2014/main" id="{7B530BA7-1E40-5907-8295-7B63A6F611C2}"/>
+              </a:ext>
+            </a:extLst>
+          </p:cNvPr>
           <p:cNvSpPr/>
           <p:nvPr/>
         </p:nvSpPr>
         <p:spPr>
           <a:xfrm>
-            <a:off x="6949440" y="4114800"/>
+            <a:off x="7263344" y="4114800"/>
             <a:ext cx="566928" cy="548640"/>
           </a:xfrm>
           <a:prstGeom prst="roundRect">
@@ -6204,13 +6645,19 @@
       </p:sp>
       <p:sp>
         <p:nvSpPr>
-          <p:cNvPr id="14" name="Text 12"/>
+          <p:cNvPr id="14" name="Text 12">
+            <a:extLst>
+              <a:ext uri="{FF2B5EF4-FFF2-40B4-BE49-F238E27FC236}">
+                <a16:creationId xmlns:a16="http://schemas.microsoft.com/office/drawing/2014/main" id="{ACB3C142-F6A6-4654-8CFC-1F92EBCA4FD8}"/>
+              </a:ext>
+            </a:extLst>
+          </p:cNvPr>
           <p:cNvSpPr txBox="1"/>
           <p:nvPr/>
         </p:nvSpPr>
         <p:spPr>
           <a:xfrm>
-            <a:off x="6949440" y="4114800"/>
+            <a:off x="7263344" y="4114800"/>
             <a:ext cx="566928" cy="548640"/>
           </a:xfrm>
           <a:prstGeom prst="rect">
@@ -6243,13 +6690,19 @@
       </p:sp>
       <p:sp>
         <p:nvSpPr>
-          <p:cNvPr id="15" name="Shape 13"/>
+          <p:cNvPr id="15" name="Shape 13">
+            <a:extLst>
+              <a:ext uri="{FF2B5EF4-FFF2-40B4-BE49-F238E27FC236}">
+                <a16:creationId xmlns:a16="http://schemas.microsoft.com/office/drawing/2014/main" id="{12A2A5AE-269D-BAFE-8FC7-3A8E24BB4FCA}"/>
+              </a:ext>
+            </a:extLst>
+          </p:cNvPr>
           <p:cNvSpPr/>
           <p:nvPr/>
         </p:nvSpPr>
         <p:spPr>
           <a:xfrm>
-            <a:off x="7626096" y="4114800"/>
+            <a:off x="7940000" y="4114800"/>
             <a:ext cx="566928" cy="548640"/>
           </a:xfrm>
           <a:prstGeom prst="roundRect">
@@ -6277,13 +6730,19 @@
       </p:sp>
       <p:sp>
         <p:nvSpPr>
-          <p:cNvPr id="16" name="Text 14"/>
+          <p:cNvPr id="16" name="Text 14">
+            <a:extLst>
+              <a:ext uri="{FF2B5EF4-FFF2-40B4-BE49-F238E27FC236}">
+                <a16:creationId xmlns:a16="http://schemas.microsoft.com/office/drawing/2014/main" id="{B42766E1-45D7-7692-146B-3D33D700A485}"/>
+              </a:ext>
+            </a:extLst>
+          </p:cNvPr>
           <p:cNvSpPr txBox="1"/>
           <p:nvPr/>
         </p:nvSpPr>
         <p:spPr>
           <a:xfrm>
-            <a:off x="7626096" y="4114800"/>
+            <a:off x="7940000" y="4114800"/>
             <a:ext cx="566928" cy="548640"/>
           </a:xfrm>
           <a:prstGeom prst="rect">
@@ -6308,7 +6767,7 @@
                 <a:ea typeface="Calibri" pitchFamily="34" charset="-122"/>
                 <a:cs typeface="Calibri" pitchFamily="34" charset="-120"/>
               </a:rPr>
-              <a:t>1</a:t>
+              <a:t>2</a:t>
             </a:r>
             <a:endParaRPr lang="en-US" sz="1200" dirty="0"/>
           </a:p>
@@ -6316,13 +6775,19 @@
       </p:sp>
       <p:sp>
         <p:nvSpPr>
-          <p:cNvPr id="17" name="Shape 15"/>
+          <p:cNvPr id="17" name="Shape 15">
+            <a:extLst>
+              <a:ext uri="{FF2B5EF4-FFF2-40B4-BE49-F238E27FC236}">
+                <a16:creationId xmlns:a16="http://schemas.microsoft.com/office/drawing/2014/main" id="{A6FD7551-B4C5-F443-43EE-21C774CA819C}"/>
+              </a:ext>
+            </a:extLst>
+          </p:cNvPr>
           <p:cNvSpPr/>
           <p:nvPr/>
         </p:nvSpPr>
         <p:spPr>
           <a:xfrm>
-            <a:off x="8302752" y="4114800"/>
+            <a:off x="8616656" y="4114800"/>
             <a:ext cx="566928" cy="548640"/>
           </a:xfrm>
           <a:prstGeom prst="roundRect">
@@ -6350,13 +6815,19 @@
       </p:sp>
       <p:sp>
         <p:nvSpPr>
-          <p:cNvPr id="18" name="Text 16"/>
+          <p:cNvPr id="18" name="Text 16">
+            <a:extLst>
+              <a:ext uri="{FF2B5EF4-FFF2-40B4-BE49-F238E27FC236}">
+                <a16:creationId xmlns:a16="http://schemas.microsoft.com/office/drawing/2014/main" id="{A9C3329F-1E10-C34D-5FB0-46384F1DB4D3}"/>
+              </a:ext>
+            </a:extLst>
+          </p:cNvPr>
           <p:cNvSpPr txBox="1"/>
           <p:nvPr/>
         </p:nvSpPr>
         <p:spPr>
           <a:xfrm>
-            <a:off x="8302752" y="4114800"/>
+            <a:off x="8616656" y="4114800"/>
             <a:ext cx="566928" cy="548640"/>
           </a:xfrm>
           <a:prstGeom prst="rect">
@@ -6381,7 +6852,7 @@
                 <a:ea typeface="Calibri" pitchFamily="34" charset="-122"/>
                 <a:cs typeface="Calibri" pitchFamily="34" charset="-120"/>
               </a:rPr>
-              <a:t>1</a:t>
+              <a:t>3</a:t>
             </a:r>
             <a:endParaRPr lang="en-US" sz="1200" dirty="0"/>
           </a:p>
@@ -6389,13 +6860,19 @@
       </p:sp>
       <p:sp>
         <p:nvSpPr>
-          <p:cNvPr id="19" name="Shape 17"/>
+          <p:cNvPr id="19" name="Shape 17">
+            <a:extLst>
+              <a:ext uri="{FF2B5EF4-FFF2-40B4-BE49-F238E27FC236}">
+                <a16:creationId xmlns:a16="http://schemas.microsoft.com/office/drawing/2014/main" id="{D44F3717-BD1D-F9F7-7D13-55954D4803DD}"/>
+              </a:ext>
+            </a:extLst>
+          </p:cNvPr>
           <p:cNvSpPr/>
           <p:nvPr/>
         </p:nvSpPr>
         <p:spPr>
           <a:xfrm>
-            <a:off x="8979408" y="4114800"/>
+            <a:off x="9293312" y="4114800"/>
             <a:ext cx="566928" cy="548640"/>
           </a:xfrm>
           <a:prstGeom prst="roundRect">
@@ -6417,19 +6894,25 @@
           <a:bodyPr/>
           <a:lstStyle/>
           <a:p>
-            <a:endParaRPr lang="en-IT"/>
-          </a:p>
-        </p:txBody>
-      </p:sp>
-      <p:sp>
-        <p:nvSpPr>
-          <p:cNvPr id="20" name="Text 18"/>
+            <a:endParaRPr lang="en-IT" dirty="0"/>
+          </a:p>
+        </p:txBody>
+      </p:sp>
+      <p:sp>
+        <p:nvSpPr>
+          <p:cNvPr id="20" name="Text 18">
+            <a:extLst>
+              <a:ext uri="{FF2B5EF4-FFF2-40B4-BE49-F238E27FC236}">
+                <a16:creationId xmlns:a16="http://schemas.microsoft.com/office/drawing/2014/main" id="{0AA9C05D-1724-60D4-0003-2BFF9325E341}"/>
+              </a:ext>
+            </a:extLst>
+          </p:cNvPr>
           <p:cNvSpPr txBox="1"/>
           <p:nvPr/>
         </p:nvSpPr>
         <p:spPr>
           <a:xfrm>
-            <a:off x="8979408" y="4114800"/>
+            <a:off x="9293312" y="4114800"/>
             <a:ext cx="566928" cy="548640"/>
           </a:xfrm>
           <a:prstGeom prst="rect">
@@ -6451,10 +6934,9 @@
                   <a:srgbClr val="FFFFFF"/>
                 </a:solidFill>
                 <a:latin typeface="Calibri" pitchFamily="34" charset="0"/>
-                <a:ea typeface="Calibri" pitchFamily="34" charset="-122"/>
-                <a:cs typeface="Calibri" pitchFamily="34" charset="-120"/>
-              </a:rPr>
-              <a:t>1</a:t>
+                <a:cs typeface="Calibri" pitchFamily="34" charset="-120"/>
+              </a:rPr>
+              <a:t>…</a:t>
             </a:r>
             <a:endParaRPr lang="en-US" sz="1200" dirty="0"/>
           </a:p>
@@ -6462,13 +6944,19 @@
       </p:sp>
       <p:sp>
         <p:nvSpPr>
-          <p:cNvPr id="21" name="Shape 19"/>
+          <p:cNvPr id="21" name="Shape 19">
+            <a:extLst>
+              <a:ext uri="{FF2B5EF4-FFF2-40B4-BE49-F238E27FC236}">
+                <a16:creationId xmlns:a16="http://schemas.microsoft.com/office/drawing/2014/main" id="{4E256A84-08A4-09D0-27F6-30400EF01F9A}"/>
+              </a:ext>
+            </a:extLst>
+          </p:cNvPr>
           <p:cNvSpPr/>
           <p:nvPr/>
         </p:nvSpPr>
         <p:spPr>
           <a:xfrm>
-            <a:off x="9656064" y="4114800"/>
+            <a:off x="9969968" y="4114800"/>
             <a:ext cx="566928" cy="548640"/>
           </a:xfrm>
           <a:prstGeom prst="roundRect">
@@ -6496,13 +6984,19 @@
       </p:sp>
       <p:sp>
         <p:nvSpPr>
-          <p:cNvPr id="22" name="Text 20"/>
+          <p:cNvPr id="22" name="Text 20">
+            <a:extLst>
+              <a:ext uri="{FF2B5EF4-FFF2-40B4-BE49-F238E27FC236}">
+                <a16:creationId xmlns:a16="http://schemas.microsoft.com/office/drawing/2014/main" id="{31559BBD-1033-97EE-E4DB-11A67EA97C57}"/>
+              </a:ext>
+            </a:extLst>
+          </p:cNvPr>
           <p:cNvSpPr txBox="1"/>
           <p:nvPr/>
         </p:nvSpPr>
         <p:spPr>
           <a:xfrm>
-            <a:off x="9656064" y="4114800"/>
+            <a:off x="9969968" y="4114800"/>
             <a:ext cx="566928" cy="548640"/>
           </a:xfrm>
           <a:prstGeom prst="rect">
@@ -6527,7 +7021,7 @@
                 <a:ea typeface="Calibri" pitchFamily="34" charset="-122"/>
                 <a:cs typeface="Calibri" pitchFamily="34" charset="-120"/>
               </a:rPr>
-              <a:t>1</a:t>
+              <a:t>N</a:t>
             </a:r>
             <a:endParaRPr lang="en-US" sz="1200" dirty="0"/>
           </a:p>
@@ -6535,7 +7029,13 @@
       </p:sp>
       <p:sp>
         <p:nvSpPr>
-          <p:cNvPr id="23" name="Text 21"/>
+          <p:cNvPr id="23" name="Text 21">
+            <a:extLst>
+              <a:ext uri="{FF2B5EF4-FFF2-40B4-BE49-F238E27FC236}">
+                <a16:creationId xmlns:a16="http://schemas.microsoft.com/office/drawing/2014/main" id="{0E3E4F1A-4AAC-D0F3-0EB6-0FB2A89E8BD8}"/>
+              </a:ext>
+            </a:extLst>
+          </p:cNvPr>
           <p:cNvSpPr txBox="1"/>
           <p:nvPr/>
         </p:nvSpPr>
@@ -6578,7 +7078,13 @@
       </p:sp>
       <p:sp>
         <p:nvSpPr>
-          <p:cNvPr id="24" name="Text 22"/>
+          <p:cNvPr id="24" name="Text 22">
+            <a:extLst>
+              <a:ext uri="{FF2B5EF4-FFF2-40B4-BE49-F238E27FC236}">
+                <a16:creationId xmlns:a16="http://schemas.microsoft.com/office/drawing/2014/main" id="{79B00B07-019C-8E8B-9DFE-2F4E4EF1C4B4}"/>
+              </a:ext>
+            </a:extLst>
+          </p:cNvPr>
           <p:cNvSpPr txBox="1"/>
           <p:nvPr/>
         </p:nvSpPr>
@@ -6624,6 +7130,11 @@
         </p:txBody>
       </p:sp>
     </p:spTree>
+    <p:extLst>
+      <p:ext uri="{BB962C8B-B14F-4D97-AF65-F5344CB8AC3E}">
+        <p14:creationId xmlns:p14="http://schemas.microsoft.com/office/powerpoint/2010/main" val="1809464738"/>
+      </p:ext>
+    </p:extLst>
   </p:cSld>
   <p:clrMapOvr>
     <a:masterClrMapping/>
@@ -9763,15 +10274,14 @@
           <a:lstStyle/>
           <a:p>
             <a:r>
-              <a:rPr lang="en-US" sz="1400" dirty="0" err="1">
+              <a:rPr lang="en-US" dirty="0">
                 <a:solidFill>
                   <a:srgbClr val="5A6482"/>
                 </a:solidFill>
-                <a:latin typeface="Menlo" panose="020B0609030804020204" pitchFamily="49" charset="0"/>
-                <a:ea typeface="Menlo" panose="020B0609030804020204" pitchFamily="49" charset="0"/>
-                <a:cs typeface="Menlo" panose="020B0609030804020204" pitchFamily="49" charset="0"/>
-              </a:rPr>
-              <a:t>consideredProps</a:t>
+                <a:latin typeface="Calibri" pitchFamily="34" charset="0"/>
+                <a:cs typeface="Calibri" pitchFamily="34" charset="-120"/>
+              </a:rPr>
+              <a:t>Current requirements and graphs are updated </a:t>
             </a:r>
             <a:r>
               <a:rPr lang="en-US" dirty="0">
@@ -9782,29 +10292,7 @@
                 <a:ea typeface="Calibri" pitchFamily="34" charset="-122"/>
                 <a:cs typeface="Calibri" pitchFamily="34" charset="-120"/>
               </a:rPr>
-              <a:t> &amp; </a:t>
-            </a:r>
-            <a:r>
-              <a:rPr lang="en-US" sz="1400" dirty="0" err="1">
-                <a:solidFill>
-                  <a:srgbClr val="5A6482"/>
-                </a:solidFill>
-                <a:latin typeface="Menlo" panose="020B0609030804020204" pitchFamily="49" charset="0"/>
-                <a:ea typeface="Menlo" panose="020B0609030804020204" pitchFamily="49" charset="0"/>
-                <a:cs typeface="Menlo" panose="020B0609030804020204" pitchFamily="49" charset="0"/>
-              </a:rPr>
-              <a:t>currentGraph</a:t>
-            </a:r>
-            <a:r>
-              <a:rPr lang="en-US" dirty="0">
-                <a:solidFill>
-                  <a:srgbClr val="5A6482"/>
-                </a:solidFill>
-                <a:latin typeface="Calibri" pitchFamily="34" charset="0"/>
-                <a:ea typeface="Calibri" pitchFamily="34" charset="-122"/>
-                <a:cs typeface="Calibri" pitchFamily="34" charset="-120"/>
-              </a:rPr>
-              <a:t>, updated at each call to propagate the intermediate result into the next iteration</a:t>
+              <a:t>at each call to propagate the intermediate result into the next iteration</a:t>
             </a:r>
             <a:endParaRPr lang="en-US" dirty="0"/>
           </a:p>
